--- a/K2-Produktivitas/M05-Batch-Prompting/K2-M05-Batch-Prompting.pptx
+++ b/K2-Produktivitas/M05-Batch-Prompting/K2-M05-Batch-Prompting.pptx
@@ -9,9 +9,10 @@
     <p:sldId id="257" r:id="rId3"/>
     <p:sldId id="258" r:id="rId4"/>
     <p:sldId id="259" r:id="rId5"/>
+    <p:sldId id="260" r:id="rId6"/>
   </p:sldIdLst>
   <p:notesMasterIdLst>
-    <p:notesMasterId r:id="rId6"/>
+    <p:notesMasterId r:id="rId7"/>
   </p:notesMasterIdLst>
   <p:sldSz cx="12191695" cy="6858000"/>
   <p:notesSz cx="6858000" cy="12191695"/>
@@ -811,6 +812,94 @@
 </p:notes>
 </file>
 
+<file path=ppt/notesSlides/notesSlide5.xml><?xml version="1.0" encoding="utf-8"?>
+<p:notes xmlns:a="http://schemas.openxmlformats.org/drawingml/2006/main" xmlns:r="http://schemas.openxmlformats.org/officeDocument/2006/relationships" xmlns:p="http://schemas.openxmlformats.org/presentationml/2006/main">
+  <p:cSld>
+    <p:spTree>
+      <p:nvGrpSpPr>
+        <p:cNvPr id="1" name=""/>
+        <p:cNvGrpSpPr/>
+        <p:nvPr/>
+      </p:nvGrpSpPr>
+      <p:grpSpPr>
+        <a:xfrm>
+          <a:off x="0" y="0"/>
+          <a:ext cx="0" cy="0"/>
+          <a:chOff x="0" y="0"/>
+          <a:chExt cx="0" cy="0"/>
+        </a:xfrm>
+      </p:grpSpPr>
+      <p:sp>
+        <p:nvSpPr>
+          <p:cNvPr id="2" name="Slide Image Placeholder 1"/>
+          <p:cNvSpPr>
+            <a:spLocks noGrp="1" noRot="1" noChangeAspect="1"/>
+          </p:cNvSpPr>
+          <p:nvPr>
+            <p:ph type="sldImg"/>
+          </p:nvPr>
+        </p:nvSpPr>
+        <p:spPr/>
+      </p:sp>
+      <p:sp>
+        <p:nvSpPr>
+          <p:cNvPr id="3" name="Notes Placeholder 2"/>
+          <p:cNvSpPr>
+            <a:spLocks noGrp="1"/>
+          </p:cNvSpPr>
+          <p:nvPr>
+            <p:ph type="body" idx="1"/>
+          </p:nvPr>
+        </p:nvSpPr>
+        <p:spPr/>
+        <p:txBody>
+          <a:bodyPr/>
+          <a:lstStyle/>
+          <a:p>
+            <a:r>
+              <a:rPr lang="en-US" dirty="0"/>
+              <a:t/>
+            </a:r>
+            <a:endParaRPr lang="en-US" dirty="0"/>
+          </a:p>
+        </p:txBody>
+      </p:sp>
+      <p:sp>
+        <p:nvSpPr>
+          <p:cNvPr id="4" name="Slide Number Placeholder 3"/>
+          <p:cNvSpPr>
+            <a:spLocks noGrp="1"/>
+          </p:cNvSpPr>
+          <p:nvPr>
+            <p:ph type="sldNum" sz="quarter" idx="10"/>
+          </p:nvPr>
+        </p:nvSpPr>
+        <p:spPr/>
+        <p:txBody>
+          <a:bodyPr/>
+          <a:lstStyle/>
+          <a:p>
+            <a:fld id="{F7021451-1387-4CA6-816F-3879F97B5CBC}" type="slidenum">
+              <a:rPr lang="en-US"/>
+              <a:t>5</a:t>
+            </a:fld>
+            <a:endParaRPr lang="en-US"/>
+          </a:p>
+        </p:txBody>
+      </p:sp>
+    </p:spTree>
+    <p:extLst>
+      <p:ext uri="{BB962C8B-B14F-4D97-AF65-F5344CB8AC3E}">
+        <p14:creationId xmlns:p14="http://schemas.microsoft.com/office/powerpoint/2010/main" val="1024086991"/>
+      </p:ext>
+    </p:extLst>
+  </p:cSld>
+  <p:clrMapOvr>
+    <a:masterClrMapping/>
+  </p:clrMapOvr>
+</p:notes>
+</file>
+
 <file path=ppt/slideLayouts/slideLayout1.xml><?xml version="1.0" encoding="utf-8"?>
 <p:sldLayout xmlns:a="http://schemas.openxmlformats.org/drawingml/2006/main" xmlns:r="http://schemas.openxmlformats.org/officeDocument/2006/relationships" xmlns:p="http://schemas.openxmlformats.org/presentationml/2006/main" preserve="1">
   <p:cSld name="DEFAULT">
@@ -3501,6 +3590,464 @@
               <a:t>5–10 output terproses sekaligus. 1 template prompt tersimpan untuk dipakai lagi.</a:t>
             </a:r>
             <a:endParaRPr lang="en-US" sz="1250" dirty="0"/>
+          </a:p>
+        </p:txBody>
+      </p:sp>
+    </p:spTree>
+  </p:cSld>
+  <p:clrMapOvr>
+    <a:masterClrMapping/>
+  </p:clrMapOvr>
+</p:sld>
+</file>
+
+<file path=ppt/slides/slide5.xml><?xml version="1.0" encoding="utf-8"?>
+<p:sld xmlns:a="http://schemas.openxmlformats.org/drawingml/2006/main" xmlns:r="http://schemas.openxmlformats.org/officeDocument/2006/relationships" xmlns:p="http://schemas.openxmlformats.org/presentationml/2006/main">
+  <p:cSld name="Slide 5">
+    <p:bg>
+      <p:bgPr>
+        <a:solidFill>
+          <a:srgbClr val="FFFFFF"/>
+        </a:solidFill>
+      </p:bgPr>
+    </p:bg>
+    <p:spTree>
+      <p:nvGrpSpPr>
+        <p:cNvPr id="1" name=""/>
+        <p:cNvGrpSpPr/>
+        <p:nvPr/>
+      </p:nvGrpSpPr>
+      <p:grpSpPr>
+        <a:xfrm>
+          <a:off x="0" y="0"/>
+          <a:ext cx="0" cy="0"/>
+          <a:chOff x="0" y="0"/>
+          <a:chExt cx="0" cy="0"/>
+        </a:xfrm>
+      </p:grpSpPr>
+      <p:sp>
+        <p:nvSpPr>
+          <p:cNvPr id="2" name="Shape 0"/>
+          <p:cNvSpPr/>
+          <p:nvPr/>
+        </p:nvSpPr>
+        <p:spPr>
+          <a:xfrm>
+            <a:off x="0" y="0"/>
+            <a:ext cx="12191695" cy="960120"/>
+          </a:xfrm>
+          <a:prstGeom prst="rect">
+            <a:avLst/>
+          </a:prstGeom>
+          <a:solidFill>
+            <a:srgbClr val="0D1321"/>
+          </a:solidFill>
+          <a:ln/>
+        </p:spPr>
+      </p:sp>
+      <p:sp>
+        <p:nvSpPr>
+          <p:cNvPr id="3" name="Shape 1"/>
+          <p:cNvSpPr/>
+          <p:nvPr/>
+        </p:nvSpPr>
+        <p:spPr>
+          <a:xfrm>
+            <a:off x="0" y="960120"/>
+            <a:ext cx="12191695" cy="41148"/>
+          </a:xfrm>
+          <a:prstGeom prst="rect">
+            <a:avLst/>
+          </a:prstGeom>
+          <a:solidFill>
+            <a:srgbClr val="6849F6"/>
+          </a:solidFill>
+          <a:ln/>
+        </p:spPr>
+      </p:sp>
+      <p:sp>
+        <p:nvSpPr>
+          <p:cNvPr id="4" name="Text 2"/>
+          <p:cNvSpPr/>
+          <p:nvPr/>
+        </p:nvSpPr>
+        <p:spPr>
+          <a:xfrm>
+            <a:off x="502920" y="256032"/>
+            <a:ext cx="3657600" cy="457200"/>
+          </a:xfrm>
+          <a:prstGeom prst="rect">
+            <a:avLst/>
+          </a:prstGeom>
+          <a:noFill/>
+          <a:ln/>
+        </p:spPr>
+        <p:txBody>
+          <a:bodyPr wrap="square" lIns="0" tIns="0" rIns="0" bIns="0" rtlCol="0" anchor="ctr"/>
+          <a:lstStyle/>
+          <a:p>
+            <a:pPr indent="0" marL="0">
+              <a:buNone/>
+            </a:pPr>
+            <a:r>
+              <a:rPr lang="en-US" sz="2000" b="1" dirty="0">
+                <a:solidFill>
+                  <a:srgbClr val="FFFFFF"/>
+                </a:solidFill>
+                <a:latin typeface="Helvetica" pitchFamily="34" charset="0"/>
+                <a:ea typeface="Helvetica" pitchFamily="34" charset="-122"/>
+                <a:cs typeface="Helvetica" pitchFamily="34" charset="-120"/>
+              </a:rPr>
+              <a:t>belajar</a:t>
+            </a:r>
+            <a:pPr indent="0" marL="0">
+              <a:buNone/>
+            </a:pPr>
+            <a:r>
+              <a:rPr lang="en-US" sz="2000" b="1" dirty="0">
+                <a:solidFill>
+                  <a:srgbClr val="8B7CF6"/>
+                </a:solidFill>
+                <a:latin typeface="Helvetica" pitchFamily="34" charset="0"/>
+                <a:ea typeface="Helvetica" pitchFamily="34" charset="-122"/>
+                <a:cs typeface="Helvetica" pitchFamily="34" charset="-120"/>
+              </a:rPr>
+              <a:t>claude</a:t>
+            </a:r>
+            <a:endParaRPr lang="en-US" sz="2000" dirty="0"/>
+          </a:p>
+        </p:txBody>
+      </p:sp>
+      <p:sp>
+        <p:nvSpPr>
+          <p:cNvPr id="5" name="Text 3"/>
+          <p:cNvSpPr/>
+          <p:nvPr/>
+        </p:nvSpPr>
+        <p:spPr>
+          <a:xfrm>
+            <a:off x="5943600" y="274320"/>
+            <a:ext cx="5760720" cy="411480"/>
+          </a:xfrm>
+          <a:prstGeom prst="rect">
+            <a:avLst/>
+          </a:prstGeom>
+          <a:noFill/>
+          <a:ln/>
+        </p:spPr>
+        <p:txBody>
+          <a:bodyPr wrap="square" lIns="0" tIns="0" rIns="0" bIns="0" rtlCol="0" anchor="ctr"/>
+          <a:lstStyle/>
+          <a:p>
+            <a:pPr algn="r" indent="0" marL="0">
+              <a:buNone/>
+            </a:pPr>
+            <a:r>
+              <a:rPr lang="en-US" sz="1250" dirty="0">
+                <a:solidFill>
+                  <a:srgbClr val="9AA2B4"/>
+                </a:solidFill>
+                <a:latin typeface="Helvetica" pitchFamily="34" charset="0"/>
+                <a:ea typeface="Helvetica" pitchFamily="34" charset="-122"/>
+                <a:cs typeface="Helvetica" pitchFamily="34" charset="-120"/>
+              </a:rPr>
+              <a:t>Modul 05 — Batch Prompting</a:t>
+            </a:r>
+            <a:endParaRPr lang="en-US" sz="1250" dirty="0"/>
+          </a:p>
+        </p:txBody>
+      </p:sp>
+      <p:sp>
+        <p:nvSpPr>
+          <p:cNvPr id="6" name="Text 4"/>
+          <p:cNvSpPr/>
+          <p:nvPr/>
+        </p:nvSpPr>
+        <p:spPr>
+          <a:xfrm>
+            <a:off x="548640" y="1188720"/>
+            <a:ext cx="11064240" cy="502920"/>
+          </a:xfrm>
+          <a:prstGeom prst="rect">
+            <a:avLst/>
+          </a:prstGeom>
+          <a:noFill/>
+          <a:ln/>
+        </p:spPr>
+        <p:txBody>
+          <a:bodyPr wrap="square" lIns="0" tIns="0" rIns="0" bIns="0" rtlCol="0" anchor="ctr"/>
+          <a:lstStyle/>
+          <a:p>
+            <a:pPr indent="0" marL="0">
+              <a:buNone/>
+            </a:pPr>
+            <a:r>
+              <a:rPr lang="en-US" sz="2200" b="1" dirty="0">
+                <a:solidFill>
+                  <a:srgbClr val="0D1321"/>
+                </a:solidFill>
+                <a:latin typeface="Helvetica" pitchFamily="34" charset="0"/>
+                <a:ea typeface="Helvetica" pitchFamily="34" charset="-122"/>
+                <a:cs typeface="Helvetica" pitchFamily="34" charset="-120"/>
+              </a:rPr>
+              <a:t>Level Up: Batch Output Tracker</a:t>
+            </a:r>
+            <a:endParaRPr lang="en-US" sz="2200" dirty="0"/>
+          </a:p>
+        </p:txBody>
+      </p:sp>
+      <p:sp>
+        <p:nvSpPr>
+          <p:cNvPr id="7" name="Text 5"/>
+          <p:cNvSpPr/>
+          <p:nvPr/>
+        </p:nvSpPr>
+        <p:spPr>
+          <a:xfrm>
+            <a:off x="548640" y="1783080"/>
+            <a:ext cx="11094415" cy="274320"/>
+          </a:xfrm>
+          <a:prstGeom prst="rect">
+            <a:avLst/>
+          </a:prstGeom>
+          <a:noFill/>
+          <a:ln/>
+        </p:spPr>
+        <p:txBody>
+          <a:bodyPr wrap="square" lIns="0" tIns="0" rIns="0" bIns="0" rtlCol="0" anchor="ctr"/>
+          <a:lstStyle/>
+          <a:p>
+            <a:pPr indent="0" marL="0">
+              <a:buNone/>
+            </a:pPr>
+            <a:r>
+              <a:rPr lang="en-US" sz="1250" b="1" spc="40" kern="0" dirty="0">
+                <a:solidFill>
+                  <a:srgbClr val="4B36C7"/>
+                </a:solidFill>
+                <a:latin typeface="Helvetica" pitchFamily="34" charset="0"/>
+                <a:ea typeface="Helvetica" pitchFamily="34" charset="-122"/>
+                <a:cs typeface="Helvetica" pitchFamily="34" charset="-120"/>
+              </a:rPr>
+              <a:t>BONUS — JANGAN CUMA SCROLL 20 HASIL</a:t>
+            </a:r>
+            <a:endParaRPr lang="en-US" sz="1250" dirty="0"/>
+          </a:p>
+        </p:txBody>
+      </p:sp>
+      <p:sp>
+        <p:nvSpPr>
+          <p:cNvPr id="8" name="Shape 6"/>
+          <p:cNvSpPr/>
+          <p:nvPr/>
+        </p:nvSpPr>
+        <p:spPr>
+          <a:xfrm>
+            <a:off x="548640" y="2112264"/>
+            <a:ext cx="11094415" cy="1236853"/>
+          </a:xfrm>
+          <a:prstGeom prst="roundRect">
+            <a:avLst>
+              <a:gd name="adj" fmla="val 7393"/>
+            </a:avLst>
+          </a:prstGeom>
+          <a:solidFill>
+            <a:srgbClr val="F3F0FF"/>
+          </a:solidFill>
+          <a:ln w="12700">
+            <a:solidFill>
+              <a:srgbClr val="DCD3FB"/>
+            </a:solidFill>
+            <a:prstDash val="solid"/>
+          </a:ln>
+        </p:spPr>
+      </p:sp>
+      <p:sp>
+        <p:nvSpPr>
+          <p:cNvPr id="9" name="Text 7"/>
+          <p:cNvSpPr/>
+          <p:nvPr/>
+        </p:nvSpPr>
+        <p:spPr>
+          <a:xfrm>
+            <a:off x="749808" y="2313432"/>
+            <a:ext cx="10692079" cy="274320"/>
+          </a:xfrm>
+          <a:prstGeom prst="rect">
+            <a:avLst/>
+          </a:prstGeom>
+          <a:noFill/>
+          <a:ln/>
+        </p:spPr>
+        <p:txBody>
+          <a:bodyPr wrap="square" lIns="0" tIns="0" rIns="0" bIns="0" rtlCol="0" anchor="ctr"/>
+          <a:lstStyle/>
+          <a:p>
+            <a:pPr indent="0" marL="0">
+              <a:buNone/>
+            </a:pPr>
+            <a:r>
+              <a:rPr lang="en-US" sz="1250" b="1" spc="30" kern="0" dirty="0">
+                <a:solidFill>
+                  <a:srgbClr val="4B36C7"/>
+                </a:solidFill>
+                <a:latin typeface="Helvetica" pitchFamily="34" charset="0"/>
+                <a:ea typeface="Helvetica" pitchFamily="34" charset="-122"/>
+                <a:cs typeface="Helvetica" pitchFamily="34" charset="-120"/>
+              </a:rPr>
+              <a:t>◆  KAPAN DIPAKAI</a:t>
+            </a:r>
+            <a:endParaRPr lang="en-US" sz="1250" dirty="0"/>
+          </a:p>
+        </p:txBody>
+      </p:sp>
+      <p:sp>
+        <p:nvSpPr>
+          <p:cNvPr id="10" name="Text 8"/>
+          <p:cNvSpPr/>
+          <p:nvPr/>
+        </p:nvSpPr>
+        <p:spPr>
+          <a:xfrm>
+            <a:off x="749808" y="2660904"/>
+            <a:ext cx="10692079" cy="487045"/>
+          </a:xfrm>
+          <a:prstGeom prst="rect">
+            <a:avLst/>
+          </a:prstGeom>
+          <a:noFill/>
+          <a:ln/>
+        </p:spPr>
+        <p:txBody>
+          <a:bodyPr wrap="square" lIns="0" tIns="0" rIns="0" bIns="0" rtlCol="0" anchor="t"/>
+          <a:lstStyle/>
+          <a:p>
+            <a:pPr indent="0" marL="0">
+              <a:lnSpc>
+                <a:spcPct val="130000"/>
+              </a:lnSpc>
+              <a:buNone/>
+            </a:pPr>
+            <a:r>
+              <a:rPr lang="en-US" sz="1250" dirty="0">
+                <a:solidFill>
+                  <a:srgbClr val="23283A"/>
+                </a:solidFill>
+                <a:latin typeface="Helvetica" pitchFamily="34" charset="0"/>
+                <a:ea typeface="Helvetica" pitchFamily="34" charset="-122"/>
+                <a:cs typeface="Helvetica" pitchFamily="34" charset="-120"/>
+              </a:rPr>
+              <a:t>Batch prompting menghasilkan banyak output sekaligus — kalau cuma jadi teks panjang, gampang lupa mana yang sudah diproses. Minta Claude susun hasilnya sebagai daftar tercentang, supaya kamu bisa pantau progres saat menindaklanjuti satu per satu.</a:t>
+            </a:r>
+            <a:endParaRPr lang="en-US" sz="1250" dirty="0"/>
+          </a:p>
+        </p:txBody>
+      </p:sp>
+      <p:sp>
+        <p:nvSpPr>
+          <p:cNvPr id="11" name="Shape 9"/>
+          <p:cNvSpPr/>
+          <p:nvPr/>
+        </p:nvSpPr>
+        <p:spPr>
+          <a:xfrm>
+            <a:off x="548640" y="3586861"/>
+            <a:ext cx="11094415" cy="1214984"/>
+          </a:xfrm>
+          <a:prstGeom prst="roundRect">
+            <a:avLst>
+              <a:gd name="adj" fmla="val 7526"/>
+            </a:avLst>
+          </a:prstGeom>
+          <a:solidFill>
+            <a:srgbClr val="141D33"/>
+          </a:solidFill>
+          <a:ln w="12700">
+            <a:solidFill>
+              <a:srgbClr val="6849F6"/>
+            </a:solidFill>
+            <a:prstDash val="solid"/>
+          </a:ln>
+        </p:spPr>
+      </p:sp>
+      <p:sp>
+        <p:nvSpPr>
+          <p:cNvPr id="12" name="Text 10"/>
+          <p:cNvSpPr/>
+          <p:nvPr/>
+        </p:nvSpPr>
+        <p:spPr>
+          <a:xfrm>
+            <a:off x="768096" y="3806317"/>
+            <a:ext cx="10655503" cy="256032"/>
+          </a:xfrm>
+          <a:prstGeom prst="rect">
+            <a:avLst/>
+          </a:prstGeom>
+          <a:noFill/>
+          <a:ln/>
+        </p:spPr>
+        <p:txBody>
+          <a:bodyPr wrap="square" lIns="0" tIns="0" rIns="0" bIns="0" rtlCol="0" anchor="ctr"/>
+          <a:lstStyle/>
+          <a:p>
+            <a:pPr indent="0" marL="0">
+              <a:buNone/>
+            </a:pPr>
+            <a:r>
+              <a:rPr lang="en-US" sz="1150" b="1" spc="30" kern="0" dirty="0">
+                <a:solidFill>
+                  <a:srgbClr val="8B7CF6"/>
+                </a:solidFill>
+                <a:latin typeface="Helvetica" pitchFamily="34" charset="0"/>
+                <a:ea typeface="Helvetica" pitchFamily="34" charset="-122"/>
+                <a:cs typeface="Helvetica" pitchFamily="34" charset="-120"/>
+              </a:rPr>
+              <a:t>CONTOH PROMPT</a:t>
+            </a:r>
+            <a:endParaRPr lang="en-US" sz="1150" dirty="0"/>
+          </a:p>
+        </p:txBody>
+      </p:sp>
+      <p:sp>
+        <p:nvSpPr>
+          <p:cNvPr id="13" name="Text 11"/>
+          <p:cNvSpPr/>
+          <p:nvPr/>
+        </p:nvSpPr>
+        <p:spPr>
+          <a:xfrm>
+            <a:off x="768096" y="4153789"/>
+            <a:ext cx="10655503" cy="428600"/>
+          </a:xfrm>
+          <a:prstGeom prst="rect">
+            <a:avLst/>
+          </a:prstGeom>
+          <a:noFill/>
+          <a:ln/>
+        </p:spPr>
+        <p:txBody>
+          <a:bodyPr wrap="square" lIns="0" tIns="0" rIns="0" bIns="0" rtlCol="0" anchor="t"/>
+          <a:lstStyle/>
+          <a:p>
+            <a:pPr indent="0" marL="0">
+              <a:lnSpc>
+                <a:spcPct val="130000"/>
+              </a:lnSpc>
+              <a:buNone/>
+            </a:pPr>
+            <a:r>
+              <a:rPr lang="en-US" sz="1100" dirty="0">
+                <a:solidFill>
+                  <a:srgbClr val="C7CDE0"/>
+                </a:solidFill>
+                <a:latin typeface="Helvetica" pitchFamily="34" charset="0"/>
+                <a:ea typeface="Helvetica" pitchFamily="34" charset="-122"/>
+                <a:cs typeface="Helvetica" pitchFamily="34" charset="-120"/>
+              </a:rPr>
+              <a:t>Dari hasil klasifikasi 10 pesan tadi (Latihan C di k2-m5-latihan-batch.txt), buatkan saya 1 halaman HTML: daftar tercentang per pesan, dengan kategori dan urgensi sebagai label warna, dan checkbox “sudah ditindaklanjuti”. Simpan sebagai 1 file yang bisa saya buka sambil kerja.</a:t>
+            </a:r>
+            <a:endParaRPr lang="en-US" sz="1100" dirty="0"/>
           </a:p>
         </p:txBody>
       </p:sp>

--- a/K2-Produktivitas/M05-Batch-Prompting/K2-M05-Batch-Prompting.pptx
+++ b/K2-Produktivitas/M05-Batch-Prompting/K2-M05-Batch-Prompting.pptx
@@ -2117,7 +2117,7 @@
                 <a:ea typeface="Helvetica" pitchFamily="34" charset="-122"/>
                 <a:cs typeface="Helvetica" pitchFamily="34" charset="-120"/>
               </a:rPr>
-              <a:t>Rina: 20 produk → 5 menit. Bandingkan: cara biasa 20 prompt terpisah = 40 menit. Batch prompting = 1 prompt, 5 menit.</a:t>
+              <a:t>20 produk → 5 menit. Bandingkan: cara biasa 20 prompt terpisah = 40 menit. Batch prompting = 1 prompt, 5 menit.</a:t>
             </a:r>
             <a:endParaRPr lang="en-US" sz="1250" dirty="0"/>
           </a:p>

--- a/K2-Produktivitas/M05-Batch-Prompting/K2-M05-Batch-Prompting.pptx
+++ b/K2-Produktivitas/M05-Batch-Prompting/K2-M05-Batch-Prompting.pptx
@@ -2651,7 +2651,7 @@
                 <a:ea typeface="Helvetica" pitchFamily="34" charset="-122"/>
                 <a:cs typeface="Helvetica" pitchFamily="34" charset="-120"/>
               </a:rPr>
-              <a:t>Kategori Review</a:t>
+              <a:t>Klasifikasi Pesan (DM/WA)</a:t>
             </a:r>
             <a:endParaRPr lang="en-US" sz="1300" dirty="0"/>
           </a:p>
@@ -2693,7 +2693,7 @@
                 <a:ea typeface="Helvetica" pitchFamily="34" charset="-122"/>
                 <a:cs typeface="Helvetica" pitchFamily="34" charset="-120"/>
               </a:rPr>
-              <a:t>"Kategorikan tiap review: POSITIF/NEGATIF/NETRAL. Ekstrak poin utama maks 5 kata. Review: 1. 'Baju bagus, jahitan rapi...'"</a:t>
+              <a:t>"Klasifikasikan tiap pesan: KOMPLAIN/PERTANYAAN/PUJIAN/PERMINTAAN + urgensi. Pesan: 1. 'Halo, saya mau tanya paket kelola Instagram berapa ya?'"</a:t>
             </a:r>
             <a:endParaRPr lang="en-US" sz="1100" dirty="0"/>
           </a:p>

--- a/K2-Produktivitas/M05-Batch-Prompting/K2-M05-Batch-Prompting.pptx
+++ b/K2-Produktivitas/M05-Batch-Prompting/K2-M05-Batch-Prompting.pptx
@@ -1739,7 +1739,7 @@
         <p:spPr>
           <a:xfrm>
             <a:off x="548640" y="2112264"/>
-            <a:ext cx="11094415" cy="498734"/>
+            <a:ext cx="11094415" cy="959104"/>
           </a:xfrm>
           <a:prstGeom prst="rect">
             <a:avLst/>
@@ -1758,7 +1758,7 @@
               <a:buNone/>
             </a:pPr>
             <a:r>
-              <a:rPr lang="en-US" sz="1300" dirty="0">
+              <a:rPr lang="en-US" sz="1250" dirty="0">
                 <a:solidFill>
                   <a:srgbClr val="23283A"/>
                 </a:solidFill>
@@ -1766,9 +1766,9 @@
                 <a:ea typeface="Helvetica" pitchFamily="34" charset="-122"/>
                 <a:cs typeface="Helvetica" pitchFamily="34" charset="-120"/>
               </a:rPr>
-              <a:t>Kamu berikan Claude satu set instruksi + daftar item — Claude proses semua sekaligus. Berlaku untuk item apapun yang butuh perlakuan sama: deskripsi produk, ringkasan review, balasan template, kategori data, dll.</a:t>
-            </a:r>
-            <a:endParaRPr lang="en-US" sz="1300" dirty="0"/>
+              <a:t>Batch prompting adalah cara memberi Claude satu set instruksi + daftar item sekaligus, supaya semuanya diproses dalam satu kali jalan — bukan satu per satu secara manual. Cocok untuk pekerjaan apapun yang butuh perlakuan sama di banyak item: deskripsi produk, ringkasan review, balasan template, kategori data, dan sejenisnya. Contohnya: 20 item yang butuh diproses satu-satu — dengan cara biasa: 20 prompt terpisah, 20 copy-paste, 40 menit. Dengan batch prompting: 1 prompt, 20 hasil, 5 menit.</a:t>
+            </a:r>
+            <a:endParaRPr lang="en-US" sz="1250" dirty="0"/>
           </a:p>
         </p:txBody>
       </p:sp>
@@ -1780,7 +1780,7 @@
         </p:nvSpPr>
         <p:spPr>
           <a:xfrm>
-            <a:off x="548640" y="2867030"/>
+            <a:off x="548640" y="3327400"/>
             <a:ext cx="11094415" cy="2416835"/>
           </a:xfrm>
           <a:prstGeom prst="roundRect">
@@ -1807,7 +1807,7 @@
         </p:nvSpPr>
         <p:spPr>
           <a:xfrm>
-            <a:off x="768096" y="3086486"/>
+            <a:off x="768096" y="3546856"/>
             <a:ext cx="10655503" cy="256032"/>
           </a:xfrm>
           <a:prstGeom prst="rect">
@@ -1846,7 +1846,7 @@
         </p:nvSpPr>
         <p:spPr>
           <a:xfrm>
-            <a:off x="768096" y="3433958"/>
+            <a:off x="768096" y="3894328"/>
             <a:ext cx="10655503" cy="219456"/>
           </a:xfrm>
           <a:prstGeom prst="rect">
@@ -1885,7 +1885,7 @@
         </p:nvSpPr>
         <p:spPr>
           <a:xfrm>
-            <a:off x="768096" y="3689990"/>
+            <a:off x="768096" y="4150360"/>
             <a:ext cx="10655503" cy="214300"/>
           </a:xfrm>
           <a:prstGeom prst="rect">
@@ -1927,7 +1927,7 @@
         </p:nvSpPr>
         <p:spPr>
           <a:xfrm>
-            <a:off x="768096" y="4014018"/>
+            <a:off x="768096" y="4474388"/>
             <a:ext cx="10655503" cy="219456"/>
           </a:xfrm>
           <a:prstGeom prst="rect">
@@ -1966,7 +1966,7 @@
         </p:nvSpPr>
         <p:spPr>
           <a:xfrm>
-            <a:off x="768096" y="4270050"/>
+            <a:off x="768096" y="4730420"/>
             <a:ext cx="10655503" cy="214300"/>
           </a:xfrm>
           <a:prstGeom prst="rect">
@@ -2008,7 +2008,7 @@
         </p:nvSpPr>
         <p:spPr>
           <a:xfrm>
-            <a:off x="768096" y="4594078"/>
+            <a:off x="768096" y="5054448"/>
             <a:ext cx="10655503" cy="219456"/>
           </a:xfrm>
           <a:prstGeom prst="rect">
@@ -2047,7 +2047,7 @@
         </p:nvSpPr>
         <p:spPr>
           <a:xfrm>
-            <a:off x="768096" y="4850110"/>
+            <a:off x="768096" y="5310480"/>
             <a:ext cx="10655503" cy="214300"/>
           </a:xfrm>
           <a:prstGeom prst="rect">
@@ -2078,48 +2078,6 @@
               <a:t>1. [item pertama]   2. [item kedua]   3. [item ketiga] ...</a:t>
             </a:r>
             <a:endParaRPr lang="en-US" sz="1100" dirty="0"/>
-          </a:p>
-        </p:txBody>
-      </p:sp>
-      <p:sp>
-        <p:nvSpPr>
-          <p:cNvPr id="17" name="Text 15"/>
-          <p:cNvSpPr/>
-          <p:nvPr/>
-        </p:nvSpPr>
-        <p:spPr>
-          <a:xfrm>
-            <a:off x="548640" y="5521609"/>
-            <a:ext cx="11094415" cy="239776"/>
-          </a:xfrm>
-          <a:prstGeom prst="rect">
-            <a:avLst/>
-          </a:prstGeom>
-          <a:noFill/>
-          <a:ln/>
-        </p:spPr>
-        <p:txBody>
-          <a:bodyPr wrap="square" lIns="0" tIns="0" rIns="0" bIns="0" rtlCol="0" anchor="t"/>
-          <a:lstStyle/>
-          <a:p>
-            <a:pPr indent="0" marL="0">
-              <a:lnSpc>
-                <a:spcPct val="128000"/>
-              </a:lnSpc>
-              <a:buNone/>
-            </a:pPr>
-            <a:r>
-              <a:rPr lang="en-US" sz="1250" dirty="0">
-                <a:solidFill>
-                  <a:srgbClr val="6B7280"/>
-                </a:solidFill>
-                <a:latin typeface="Helvetica" pitchFamily="34" charset="0"/>
-                <a:ea typeface="Helvetica" pitchFamily="34" charset="-122"/>
-                <a:cs typeface="Helvetica" pitchFamily="34" charset="-120"/>
-              </a:rPr>
-              <a:t>20 produk → 5 menit. Bandingkan: cara biasa 20 prompt terpisah = 40 menit. Batch prompting = 1 prompt, 5 menit.</a:t>
-            </a:r>
-            <a:endParaRPr lang="en-US" sz="1250" dirty="0"/>
           </a:p>
         </p:txBody>
       </p:sp>
